--- a/test/Sertifikat-shablon.pptx
+++ b/test/Sertifikat-shablon.pptx
@@ -1284,7 +1284,7 @@
             <a:r>
               <a:rPr lang="ru-RU" sz="1400" b="1" dirty="0">
                 <a:solidFill>
-                  <a:srgbClr val="0C6FF1"/>
+                  <a:srgbClr val="1A1A1A"/>
                 </a:solidFill>
                 <a:latin typeface="Arial" panose="020B0604020202020204"/>
               </a:rPr>

--- a/test/Sertifikat-shablon.pptx
+++ b/test/Sertifikat-shablon.pptx
@@ -1507,7 +1507,7 @@
                 <a:ea typeface="Arial" panose="020B0604020202020204" pitchFamily="34" charset="-122"/>
                 <a:cs typeface="Arial" panose="020B0604020202020204" pitchFamily="34" charset="-120"/>
               </a:rPr>
-              <a:t>2026 г.</a:t>
+              <a:t>2027 г.</a:t>
             </a:r>
             <a:endParaRPr lang="en-US" sz="2000" dirty="0"/>
           </a:p>
